--- a/DBTUNING/ch05_FullScan_vs_IndexScan/ch05_교안.pptx
+++ b/DBTUNING/ch05_FullScan_vs_IndexScan/ch05_교안.pptx
@@ -542,7 +542,7 @@
           <a:lstStyle/>
           <a:p>
             <a:r>
-              <a:t>제4장은 앞 장에서 익힌 실행계획 읽기를 판단으로 바꾸는 장이다. Full Scan과 Index Scan 중 어느 쪽이 유리한지를 감이 아니라 비용 구조로 설명하는 것이 목표다. 이 장의 모든 실행계획과 Buffers 값은 진료비청구심사 실습 DB에서 직접 캡처한 실측값이며, 인덱스를 새로 만들지 않고 기존 PK만으로 관찰한다는 점을 미리 알려 준다. 학습자가 이 장을 마치면 인덱스가 있느냐 없느냐가 아니라 테이블이 얼마나 크고 조건이 얼마나 걸러 내느냐로 접근 방식을 예측할 수 있어야 한다. 첫 화면에서 이 목표를 한 문장으로 못 박아 두면 이후 이론 구간이 지루하게 느껴지지 않는다.</a:t>
+              <a:t>제ch05은 앞 장에서 익힌 실행계획 읽기를 판단으로 바꾸는 장이다. Full Scan과 Index Scan 중 어느 쪽이 유리한지를 감이 아니라 비용 구조로 설명하는 것이 목표다. 이 장의 모든 실행계획과 Buffers 값은 진료비청구심사 실습 DB에서 직접 캡처한 실측값이며, 인덱스를 새로 만들지 않고 기존 PK만으로 관찰한다는 점을 미리 알려 준다. 학습자가 이 장을 마치면 인덱스가 있느냐 없느냐가 아니라 테이블이 얼마나 크고 조건이 얼마나 걸러 내느냐로 접근 방식을 예측할 수 있어야 한다. 첫 화면에서 이 목표를 한 문장으로 못 박아 두면 이후 이론 구간이 지루하게 느껴지지 않는다.</a:t>
             </a:r>
           </a:p>
         </p:txBody>
@@ -612,7 +612,7 @@
           <a:lstStyle/>
           <a:p>
             <a:r>
-              <a:t>E-Rows와 A-Rows를 카디널리티라는 개념으로 다시 묶어 주는 것이 이 슬라이드의 핵심이다. 3장에서는 두 컬럼을 그냥 추정과 실제로만 배웠지만, 여기서는 그것이 옵티마이저 판단의 입력값이라는 사실을 알게 된다. 추정이 어긋나면 접근 방식 선택 자체가 틀어진다는 인과를 짚어 주면, 통계정보 수집이 왜 튜닝의 기본기인지 자연스럽게 연결된다. 비율과 개수를 구분해야 하는 실무적 이유도 덧붙이면 좋은데, 같은 비율이라도 전체 규모가 다르면 실제 처리량이 완전히 달라지기 때문이다.</a:t>
+              <a:t>E-Rows와 A-Rows를 카디널리티라는 개념으로 다시 묶어 주는 것이 이 슬라이드의 핵심이다. ch03에서는 두 컬럼을 그냥 추정과 실제로만 배웠지만, 여기서는 그것이 옵티마이저 판단의 입력값이라는 사실을 알게 된다. 추정이 어긋나면 접근 방식 선택 자체가 틀어진다는 인과를 짚어 주면, 통계정보 수집이 왜 튜닝의 기본기인지 자연스럽게 연결된다. 비율과 개수를 구분해야 하는 실무적 이유도 덧붙이면 좋은데, 같은 비율이라도 전체 규모가 다르면 실제 처리량이 완전히 달라지기 때문이다.</a:t>
             </a:r>
           </a:p>
         </p:txBody>
@@ -1732,7 +1732,7 @@
           <a:lstStyle/>
           <a:p>
             <a:r>
-              <a:t>변수를 하나씩 지워 나가는 방식으로 결론에 도달하게 하는 것이 이 슬라이드의 구성 의도다. 오퍼레이션이 같으니 접근 방식 탓이 아니고, 결과 건수는 방향이 반대이니 그것도 아니다. 남는 것은 테이블 크기뿐이다. 마지막 줄도 중요한데, A-Time만 보고 판단하면 두 쿼리가 비슷해 보인다. 1장에서 배운 대로 시간이 아니라 자원으로 판단해야 하는 이유가 여기서 다시 확인된다. 같은 시간이 걸렸다고 같은 비용이 든 것이 아니라는 점을 반드시 말로 확인시킨다.</a:t>
+              <a:t>변수를 하나씩 지워 나가는 방식으로 결론에 도달하게 하는 것이 이 슬라이드의 구성 의도다. 오퍼레이션이 같으니 접근 방식 탓이 아니고, 결과 건수는 방향이 반대이니 그것도 아니다. 남는 것은 테이블 크기뿐이다. 마지막 줄도 중요한데, A-Time만 보고 판단하면 두 쿼리가 비슷해 보인다. ch01에서 배운 대로 시간이 아니라 자원으로 판단해야 하는 이유가 여기서 다시 확인된다. 같은 시간이 걸렸다고 같은 비용이 든 것이 아니라는 점을 반드시 말로 확인시킨다.</a:t>
             </a:r>
           </a:p>
         </p:txBody>
@@ -2292,7 +2292,7 @@
           <a:lstStyle/>
           <a:p>
             <a:r>
-              <a:t>Chapter 3에서 다룬 인덱스만으로 끝나는 쿼리와 테이블까지 가야 하는 쿼리의 구분이 여기서 다시 등장한다. 학습자에게 그 구분이 단순한 분류가 아니라 접근 방식 선택의 경계를 움직이는 변수였다는 점을 알려 준다. 실무에서 커버링 인덱스를 설계하는 이유가 정확히 이것이며, 다음 장의 인덱스 설계 논의로 자연스럽게 이어지는 다리 역할을 한다. 비싼 절반이 사라진다는 표현을 쓰면 왜 경계가 그렇게 크게 밀리는지가 직관적으로 전달된다.</a:t>
+              <a:t>ch03에서 다룬 인덱스만으로 끝나는 쿼리와 테이블까지 가야 하는 쿼리의 구분이 여기서 다시 등장한다. 학습자에게 그 구분이 단순한 분류가 아니라 접근 방식 선택의 경계를 움직이는 변수였다는 점을 알려 준다. 실무에서 커버링 인덱스를 설계하는 이유가 정확히 이것이며, 다음 장의 인덱스 설계 논의로 자연스럽게 이어지는 다리 역할을 한다. 비싼 절반이 사라진다는 표현을 쓰면 왜 경계가 그렇게 크게 밀리는지가 직관적으로 전달된다.</a:t>
             </a:r>
           </a:p>
         </p:txBody>
@@ -2852,7 +2852,7 @@
           <a:lstStyle/>
           <a:p>
             <a:r>
-              <a:t>첫 절은 이 장이 왜 필요한지를 납득시키는 구간이다. 3장을 마친 학습자는 실행계획의 오퍼레이션 이름을 읽을 수 있게 되었지만, 그 계획이 좋은 계획인지 판단할 기준은 아직 없다. 여기서 읽을 수 있다는 것과 판단할 수 있다는 것이 서로 다른 능력이라는 점을 분명히 해 두면, 뒤이어 나오는 비용 구조 설명이 지루한 이론이 아니라 필요한 도구로 받아들여진다. 절 제목을 읽어 준 다음 학습자에게 인덱스를 타는 계획과 안 타는 계획 중 어느 쪽이 좋은 계획이냐고 먼저 물어보면 이 절의 문제의식이 곧바로 살아난다.</a:t>
+              <a:t>첫 절은 이 장이 왜 필요한지를 납득시키는 구간이다. ch03을 마친 학습자는 실행계획의 오퍼레이션 이름을 읽을 수 있게 되었지만, 그 계획이 좋은 계획인지 판단할 기준은 아직 없다. 여기서 읽을 수 있다는 것과 판단할 수 있다는 것이 서로 다른 능력이라는 점을 분명히 해 두면, 뒤이어 나오는 비용 구조 설명이 지루한 이론이 아니라 필요한 도구로 받아들여진다. 절 제목을 읽어 준 다음 학습자에게 인덱스를 타는 계획과 안 타는 계획 중 어느 쪽이 좋은 계획이냐고 먼저 물어보면 이 절의 문제의식이 곧바로 살아난다.</a:t>
             </a:r>
           </a:p>
         </p:txBody>
@@ -6429,7 +6429,7 @@
                 </a:solidFill>
                 <a:latin typeface="Malgun Gothic"/>
               </a:rPr>
-              <a:t>Oracle SQL 튜닝 과정  ·  제4장</a:t>
+              <a:t>Oracle SQL 튜닝 과정  ·  제ch05</a:t>
             </a:r>
           </a:p>
         </p:txBody>
@@ -14170,7 +14170,7 @@
                 </a:solidFill>
                 <a:latin typeface="Malgun Gothic"/>
               </a:rPr>
-              <a:t>Chapter 5 예고 — 인덱스 설계로</a:t>
+              <a:t>ch06 예고 — 인덱스 설계로</a:t>
             </a:r>
           </a:p>
         </p:txBody>
@@ -14464,7 +14464,7 @@
                 </a:solidFill>
                 <a:latin typeface="Malgun Gothic"/>
               </a:rPr>
-              <a:t>•  Chapter 3에서 다룬 것과 남겨 둔 것</a:t>
+              <a:t>•  ch03에서 다룬 것과 남겨 둔 것</a:t>
             </a:r>
           </a:p>
           <a:p>
@@ -14839,7 +14839,7 @@
                 </a:solidFill>
                 <a:latin typeface="Malgun Gothic"/>
               </a:rPr>
-              <a:t>•  실습문제 10문항 — SQL튜닝_Ch04_문제.md</a:t>
+              <a:t>•  실습문제 10문항 — ch05_문제.md</a:t>
             </a:r>
           </a:p>
           <a:p>
@@ -15053,7 +15053,7 @@
                 </a:solidFill>
                 <a:latin typeface="Malgun Gothic"/>
               </a:rPr>
-              <a:t>Chapter 3에서 여기까지</a:t>
+              <a:t>ch03에서 여기까지</a:t>
             </a:r>
           </a:p>
         </p:txBody>
@@ -15087,7 +15087,7 @@
                 </a:solidFill>
                 <a:latin typeface="Malgun Gothic"/>
               </a:rPr>
-              <a:t>•  Chapter 3에서 얻은 것 — 실행계획을 읽는 어휘</a:t>
+              <a:t>•  ch03에서 얻은 것 — 실행계획을 읽는 어휘</a:t>
             </a:r>
           </a:p>
           <a:p>
@@ -15120,7 +15120,7 @@
                 </a:solidFill>
                 <a:latin typeface="Malgun Gothic"/>
               </a:rPr>
-              <a:t>•  Chapter 3에서 다루지 않은 것 — 어느 쪽이 유리한지의 판단</a:t>
+              <a:t>•  ch03에서 다루지 않은 것 — 어느 쪽이 유리한지의 판단</a:t>
             </a:r>
           </a:p>
           <a:p>
@@ -15550,7 +15550,7 @@
                 </a:solidFill>
                 <a:latin typeface="Malgun Gothic"/>
               </a:rPr>
-              <a:t>    –  인덱스 설계 자체는 Chapter 5의 주제</a:t>
+              <a:t>    –  인덱스 설계 자체는 ch06의 주제</a:t>
             </a:r>
           </a:p>
           <a:p>

--- a/DBTUNING/ch05_FullScan_vs_IndexScan/ch05_교안.pptx
+++ b/DBTUNING/ch05_FullScan_vs_IndexScan/ch05_교안.pptx
@@ -542,7 +542,7 @@
           <a:lstStyle/>
           <a:p>
             <a:r>
-              <a:t>제ch05은 앞 장에서 익힌 실행계획 읽기를 판단으로 바꾸는 장이다. Full Scan과 Index Scan 중 어느 쪽이 유리한지를 감이 아니라 비용 구조로 설명하는 것이 목표다. 이 장의 모든 실행계획과 Buffers 값은 진료비청구심사 실습 DB에서 직접 캡처한 실측값이며, 인덱스를 새로 만들지 않고 기존 PK만으로 관찰한다는 점을 미리 알려 준다. 학습자가 이 장을 마치면 인덱스가 있느냐 없느냐가 아니라 테이블이 얼마나 크고 조건이 얼마나 걸러 내느냐로 접근 방식을 예측할 수 있어야 한다. 첫 화면에서 이 목표를 한 문장으로 못 박아 두면 이후 이론 구간이 지루하게 느껴지지 않는다.</a:t>
+              <a:t>ch05은 앞 장에서 익힌 실행계획 읽기를 판단으로 바꾸는 장이다. Full Scan과 Index Scan 중 어느 쪽이 유리한지를 감이 아니라 비용 구조로 설명하는 것이 목표다. 이 장의 모든 실행계획과 Buffers 값은 진료비청구심사 실습 DB에서 직접 캡처한 실측값이며, 인덱스를 새로 만들지 않고 기존 PK만으로 관찰한다는 점을 미리 알려 준다. 학습자가 이 장을 마치면 인덱스가 있느냐 없느냐가 아니라 테이블이 얼마나 크고 조건이 얼마나 걸러 내느냐로 접근 방식을 예측할 수 있어야 한다. 첫 화면에서 이 목표를 한 문장으로 못 박아 두면 이후 이론 구간이 지루하게 느껴지지 않는다.</a:t>
             </a:r>
           </a:p>
         </p:txBody>
@@ -6429,7 +6429,7 @@
                 </a:solidFill>
                 <a:latin typeface="Malgun Gothic"/>
               </a:rPr>
-              <a:t>Oracle SQL 튜닝 과정  ·  제ch05</a:t>
+              <a:t>Oracle SQL 튜닝 과정  ·  ch05</a:t>
             </a:r>
           </a:p>
         </p:txBody>
